--- a/out/demo_advanced.pptx
+++ b/out/demo_advanced.pptx
@@ -535,6 +535,111 @@
               </a:solidFill>
             </c:spPr>
           </c:dPt>
+          <c:dLbls>
+            <c:dLbl>
+              <c:idx val="0"/>
+              <c:spPr/>
+              <c:numFmt formatCode="0%" sourceLinked="0"/>
+              <c:txPr>
+                <a:bodyPr/>
+                <a:lstStyle/>
+                <a:p>
+                  <a:pPr>
+                    <a:defRPr sz="1000">
+                      <a:solidFill>
+                        <a:srgbClr val="1B2432"/>
+                      </a:solidFill>
+                    </a:defRPr>
+                  </a:pPr>
+                </a:p>
+              </c:txPr>
+              <c:showLegendKey val="0"/>
+              <c:showVal val="1"/>
+              <c:showCatName val="0"/>
+              <c:showSerName val="0"/>
+              <c:showPercent val="0"/>
+              <c:showBubbleSize val="0"/>
+            </c:dLbl>
+            <c:dLbl>
+              <c:idx val="1"/>
+              <c:spPr/>
+              <c:numFmt formatCode="0%" sourceLinked="0"/>
+              <c:txPr>
+                <a:bodyPr/>
+                <a:lstStyle/>
+                <a:p>
+                  <a:pPr>
+                    <a:defRPr sz="1000">
+                      <a:solidFill>
+                        <a:srgbClr val="1B2432"/>
+                      </a:solidFill>
+                    </a:defRPr>
+                  </a:pPr>
+                </a:p>
+              </c:txPr>
+              <c:showLegendKey val="0"/>
+              <c:showVal val="1"/>
+              <c:showCatName val="0"/>
+              <c:showSerName val="0"/>
+              <c:showPercent val="0"/>
+              <c:showBubbleSize val="0"/>
+            </c:dLbl>
+            <c:dLbl>
+              <c:idx val="2"/>
+              <c:spPr/>
+              <c:numFmt formatCode="0%" sourceLinked="0"/>
+              <c:txPr>
+                <a:bodyPr/>
+                <a:lstStyle/>
+                <a:p>
+                  <a:pPr>
+                    <a:defRPr sz="1000">
+                      <a:solidFill>
+                        <a:srgbClr val="1B2432"/>
+                      </a:solidFill>
+                    </a:defRPr>
+                  </a:pPr>
+                </a:p>
+              </c:txPr>
+              <c:showLegendKey val="0"/>
+              <c:showVal val="1"/>
+              <c:showCatName val="0"/>
+              <c:showSerName val="0"/>
+              <c:showPercent val="0"/>
+              <c:showBubbleSize val="0"/>
+            </c:dLbl>
+            <c:dLbl>
+              <c:idx val="3"/>
+              <c:spPr/>
+              <c:numFmt formatCode="0%" sourceLinked="0"/>
+              <c:txPr>
+                <a:bodyPr/>
+                <a:lstStyle/>
+                <a:p>
+                  <a:pPr>
+                    <a:defRPr sz="1000">
+                      <a:solidFill>
+                        <a:srgbClr val="1B2432"/>
+                      </a:solidFill>
+                    </a:defRPr>
+                  </a:pPr>
+                </a:p>
+              </c:txPr>
+              <c:showLegendKey val="0"/>
+              <c:showVal val="1"/>
+              <c:showCatName val="0"/>
+              <c:showSerName val="0"/>
+              <c:showPercent val="0"/>
+              <c:showBubbleSize val="0"/>
+            </c:dLbl>
+            <c:showLegendKey val="0"/>
+            <c:showVal val="0"/>
+            <c:showCatName val="0"/>
+            <c:showSerName val="0"/>
+            <c:showPercent val="0"/>
+            <c:showBubbleSize val="0"/>
+            <c:showLeaderLines val="1"/>
+          </c:dLbls>
           <c:cat>
             <c:strRef>
               <c:f>Sheet1!$A$2:$A$5</c:f>
@@ -1047,7 +1152,7 @@
           </a:ln>
         </c:spPr>
         <c:crossAx val="-2068027336"/>
-        <c:crosses val="autoZero"/>
+        <c:crosses val="max"/>
       </c:valAx>
     </c:plotArea>
     <c:dispBlanksAs val="gap"/>
@@ -1099,6 +1204,17 @@
     </c:title>
     <c:autoTitleDeleted val="0"/>
     <c:plotArea>
+      <c:layout>
+        <c:manualLayout>
+          <c:layoutTarget val="inner"/>
+          <c:xMode val="edge"/>
+          <c:yMode val="edge"/>
+          <c:x val="0.09"/>
+          <c:y val="0.04"/>
+          <c:w val="0.8019637663093161"/>
+          <c:h val="0.86"/>
+        </c:manualLayout>
+      </c:layout>
       <c:lineChart>
         <c:grouping val="standard"/>
         <c:varyColors val="0"/>
@@ -1600,6 +1716,29 @@
               <a:srgbClr val="0B2545"/>
             </a:solidFill>
           </c:spPr>
+          <c:dLbls>
+            <c:numFmt formatCode="0" sourceLinked="0"/>
+            <c:txPr>
+              <a:bodyPr/>
+              <a:lstStyle/>
+              <a:p>
+                <a:pPr>
+                  <a:defRPr sz="1000">
+                    <a:solidFill>
+                      <a:srgbClr val="FFFFFF"/>
+                    </a:solidFill>
+                  </a:defRPr>
+                </a:pPr>
+              </a:p>
+            </c:txPr>
+            <c:showLegendKey val="0"/>
+            <c:showVal val="1"/>
+            <c:showCatName val="0"/>
+            <c:showSerName val="0"/>
+            <c:showPercent val="0"/>
+            <c:showBubbleSize val="0"/>
+            <c:showLeaderLines val="1"/>
+          </c:dLbls>
           <c:cat>
             <c:strRef>
               <c:f>Sheet1!$A$2:$A$7</c:f>
@@ -1673,6 +1812,29 @@
               <a:srgbClr val="FF6B35"/>
             </a:solidFill>
           </c:spPr>
+          <c:dLbls>
+            <c:numFmt formatCode="0" sourceLinked="0"/>
+            <c:txPr>
+              <a:bodyPr/>
+              <a:lstStyle/>
+              <a:p>
+                <a:pPr>
+                  <a:defRPr sz="1000">
+                    <a:solidFill>
+                      <a:srgbClr val="1B2432"/>
+                    </a:solidFill>
+                  </a:defRPr>
+                </a:pPr>
+              </a:p>
+            </c:txPr>
+            <c:showLegendKey val="0"/>
+            <c:showVal val="1"/>
+            <c:showCatName val="0"/>
+            <c:showSerName val="0"/>
+            <c:showPercent val="0"/>
+            <c:showBubbleSize val="0"/>
+            <c:showLeaderLines val="1"/>
+          </c:dLbls>
           <c:cat>
             <c:strRef>
               <c:f>Sheet1!$A$2:$A$7</c:f>
@@ -1746,6 +1908,29 @@
               <a:srgbClr val="13A89E"/>
             </a:solidFill>
           </c:spPr>
+          <c:dLbls>
+            <c:numFmt formatCode="0" sourceLinked="0"/>
+            <c:txPr>
+              <a:bodyPr/>
+              <a:lstStyle/>
+              <a:p>
+                <a:pPr>
+                  <a:defRPr sz="1000">
+                    <a:solidFill>
+                      <a:srgbClr val="FFFFFF"/>
+                    </a:solidFill>
+                  </a:defRPr>
+                </a:pPr>
+              </a:p>
+            </c:txPr>
+            <c:showLegendKey val="0"/>
+            <c:showVal val="1"/>
+            <c:showCatName val="0"/>
+            <c:showSerName val="0"/>
+            <c:showPercent val="0"/>
+            <c:showBubbleSize val="0"/>
+            <c:showLeaderLines val="1"/>
+          </c:dLbls>
           <c:cat>
             <c:strRef>
               <c:f>Sheet1!$A$2:$A$7</c:f>
@@ -2318,7 +2503,11 @@
               <a:lstStyle/>
               <a:p>
                 <a:pPr>
-                  <a:defRPr sz="1000" b="1"/>
+                  <a:defRPr sz="1000" b="1">
+                    <a:solidFill>
+                      <a:srgbClr val="FFFFFF"/>
+                    </a:solidFill>
+                  </a:defRPr>
                 </a:pPr>
               </a:p>
             </c:txPr>
@@ -2404,7 +2593,11 @@
               <a:lstStyle/>
               <a:p>
                 <a:pPr>
-                  <a:defRPr sz="1000" b="1"/>
+                  <a:defRPr sz="1000" b="1">
+                    <a:solidFill>
+                      <a:srgbClr val="FFFFFF"/>
+                    </a:solidFill>
+                  </a:defRPr>
                 </a:pPr>
               </a:p>
             </c:txPr>
@@ -2490,7 +2683,11 @@
               <a:lstStyle/>
               <a:p>
                 <a:pPr>
-                  <a:defRPr sz="1000" b="1"/>
+                  <a:defRPr sz="1000" b="1">
+                    <a:solidFill>
+                      <a:srgbClr val="FFFFFF"/>
+                    </a:solidFill>
+                  </a:defRPr>
                 </a:pPr>
               </a:p>
             </c:txPr>
@@ -2650,6 +2847,29 @@
               <a:srgbClr val="0B2545"/>
             </a:solidFill>
           </c:spPr>
+          <c:dLbls>
+            <c:numFmt formatCode="$#,##0,&quot;K&quot;" sourceLinked="0"/>
+            <c:txPr>
+              <a:bodyPr/>
+              <a:lstStyle/>
+              <a:p>
+                <a:pPr>
+                  <a:defRPr sz="1000">
+                    <a:solidFill>
+                      <a:srgbClr val="FFFFFF"/>
+                    </a:solidFill>
+                  </a:defRPr>
+                </a:pPr>
+              </a:p>
+            </c:txPr>
+            <c:showLegendKey val="0"/>
+            <c:showVal val="1"/>
+            <c:showCatName val="0"/>
+            <c:showSerName val="0"/>
+            <c:showPercent val="0"/>
+            <c:showBubbleSize val="0"/>
+            <c:showLeaderLines val="1"/>
+          </c:dLbls>
           <c:cat>
             <c:strRef>
               <c:f>Sheet1!$A$2:$A$5</c:f>
@@ -2711,6 +2931,29 @@
               <a:srgbClr val="FF6B35"/>
             </a:solidFill>
           </c:spPr>
+          <c:dLbls>
+            <c:numFmt formatCode="$#,##0,&quot;K&quot;" sourceLinked="0"/>
+            <c:txPr>
+              <a:bodyPr/>
+              <a:lstStyle/>
+              <a:p>
+                <a:pPr>
+                  <a:defRPr sz="1000">
+                    <a:solidFill>
+                      <a:srgbClr val="1B2432"/>
+                    </a:solidFill>
+                  </a:defRPr>
+                </a:pPr>
+              </a:p>
+            </c:txPr>
+            <c:showLegendKey val="0"/>
+            <c:showVal val="1"/>
+            <c:showCatName val="0"/>
+            <c:showSerName val="0"/>
+            <c:showPercent val="0"/>
+            <c:showBubbleSize val="0"/>
+            <c:showLeaderLines val="1"/>
+          </c:dLbls>
           <c:cat>
             <c:strRef>
               <c:f>Sheet1!$A$2:$A$5</c:f>
@@ -2876,6 +3119,29 @@
               <a:srgbClr val="0B2545"/>
             </a:solidFill>
           </c:spPr>
+          <c:dLbls>
+            <c:numFmt formatCode="$#,##0,&quot;K&quot;" sourceLinked="0"/>
+            <c:txPr>
+              <a:bodyPr/>
+              <a:lstStyle/>
+              <a:p>
+                <a:pPr>
+                  <a:defRPr sz="1000">
+                    <a:solidFill>
+                      <a:srgbClr val="FFFFFF"/>
+                    </a:solidFill>
+                  </a:defRPr>
+                </a:pPr>
+              </a:p>
+            </c:txPr>
+            <c:showLegendKey val="0"/>
+            <c:showVal val="1"/>
+            <c:showCatName val="0"/>
+            <c:showSerName val="0"/>
+            <c:showPercent val="0"/>
+            <c:showBubbleSize val="0"/>
+            <c:showLeaderLines val="1"/>
+          </c:dLbls>
           <c:cat>
             <c:strRef>
               <c:f>Sheet1!$A$2:$A$5</c:f>
@@ -2937,6 +3203,29 @@
               <a:srgbClr val="FF6B35"/>
             </a:solidFill>
           </c:spPr>
+          <c:dLbls>
+            <c:numFmt formatCode="$#,##0,&quot;K&quot;" sourceLinked="0"/>
+            <c:txPr>
+              <a:bodyPr/>
+              <a:lstStyle/>
+              <a:p>
+                <a:pPr>
+                  <a:defRPr sz="1000">
+                    <a:solidFill>
+                      <a:srgbClr val="1B2432"/>
+                    </a:solidFill>
+                  </a:defRPr>
+                </a:pPr>
+              </a:p>
+            </c:txPr>
+            <c:showLegendKey val="0"/>
+            <c:showVal val="1"/>
+            <c:showCatName val="0"/>
+            <c:showSerName val="0"/>
+            <c:showPercent val="0"/>
+            <c:showBubbleSize val="0"/>
+            <c:showLeaderLines val="1"/>
+          </c:dLbls>
           <c:cat>
             <c:strRef>
               <c:f>Sheet1!$A$2:$A$5</c:f>
@@ -3102,6 +3391,29 @@
               <a:srgbClr val="0B2545"/>
             </a:solidFill>
           </c:spPr>
+          <c:dLbls>
+            <c:numFmt formatCode="$#,##0,&quot;K&quot;" sourceLinked="0"/>
+            <c:txPr>
+              <a:bodyPr/>
+              <a:lstStyle/>
+              <a:p>
+                <a:pPr>
+                  <a:defRPr sz="1000">
+                    <a:solidFill>
+                      <a:srgbClr val="FFFFFF"/>
+                    </a:solidFill>
+                  </a:defRPr>
+                </a:pPr>
+              </a:p>
+            </c:txPr>
+            <c:showLegendKey val="0"/>
+            <c:showVal val="1"/>
+            <c:showCatName val="0"/>
+            <c:showSerName val="0"/>
+            <c:showPercent val="0"/>
+            <c:showBubbleSize val="0"/>
+            <c:showLeaderLines val="1"/>
+          </c:dLbls>
           <c:cat>
             <c:strRef>
               <c:f>Sheet1!$A$2:$A$5</c:f>
@@ -3163,6 +3475,29 @@
               <a:srgbClr val="FF6B35"/>
             </a:solidFill>
           </c:spPr>
+          <c:dLbls>
+            <c:numFmt formatCode="$#,##0,&quot;K&quot;" sourceLinked="0"/>
+            <c:txPr>
+              <a:bodyPr/>
+              <a:lstStyle/>
+              <a:p>
+                <a:pPr>
+                  <a:defRPr sz="1000">
+                    <a:solidFill>
+                      <a:srgbClr val="1B2432"/>
+                    </a:solidFill>
+                  </a:defRPr>
+                </a:pPr>
+              </a:p>
+            </c:txPr>
+            <c:showLegendKey val="0"/>
+            <c:showVal val="1"/>
+            <c:showCatName val="0"/>
+            <c:showSerName val="0"/>
+            <c:showPercent val="0"/>
+            <c:showBubbleSize val="0"/>
+            <c:showLeaderLines val="1"/>
+          </c:dLbls>
           <c:cat>
             <c:strRef>
               <c:f>Sheet1!$A$2:$A$5</c:f>
@@ -3348,6 +3683,29 @@
               <a:srgbClr val="0B2545"/>
             </a:solidFill>
           </c:spPr>
+          <c:dLbls>
+            <c:numFmt formatCode="$#,##0,&quot;K&quot;" sourceLinked="0"/>
+            <c:txPr>
+              <a:bodyPr/>
+              <a:lstStyle/>
+              <a:p>
+                <a:pPr>
+                  <a:defRPr sz="1000">
+                    <a:solidFill>
+                      <a:srgbClr val="FFFFFF"/>
+                    </a:solidFill>
+                  </a:defRPr>
+                </a:pPr>
+              </a:p>
+            </c:txPr>
+            <c:showLegendKey val="0"/>
+            <c:showVal val="1"/>
+            <c:showCatName val="0"/>
+            <c:showSerName val="0"/>
+            <c:showPercent val="0"/>
+            <c:showBubbleSize val="0"/>
+            <c:showLeaderLines val="1"/>
+          </c:dLbls>
           <c:cat>
             <c:strRef>
               <c:f>Sheet1!$A$2:$A$5</c:f>
@@ -3409,6 +3767,29 @@
               <a:srgbClr val="FF6B35"/>
             </a:solidFill>
           </c:spPr>
+          <c:dLbls>
+            <c:numFmt formatCode="$#,##0,&quot;K&quot;" sourceLinked="0"/>
+            <c:txPr>
+              <a:bodyPr/>
+              <a:lstStyle/>
+              <a:p>
+                <a:pPr>
+                  <a:defRPr sz="1000">
+                    <a:solidFill>
+                      <a:srgbClr val="1B2432"/>
+                    </a:solidFill>
+                  </a:defRPr>
+                </a:pPr>
+              </a:p>
+            </c:txPr>
+            <c:showLegendKey val="0"/>
+            <c:showVal val="1"/>
+            <c:showCatName val="0"/>
+            <c:showSerName val="0"/>
+            <c:showPercent val="0"/>
+            <c:showBubbleSize val="0"/>
+            <c:showLeaderLines val="1"/>
+          </c:dLbls>
           <c:cat>
             <c:strRef>
               <c:f>Sheet1!$A$2:$A$5</c:f>
@@ -3793,7 +4174,7 @@
           </a:ln>
         </c:spPr>
         <c:crossAx val="-2068027336"/>
-        <c:crosses val="autoZero"/>
+        <c:crosses val="max"/>
       </c:valAx>
     </c:plotArea>
     <c:dispBlanksAs val="gap"/>
@@ -9443,12 +9824,12 @@
         </p:nvSpPr>
         <p:spPr>
           <a:xfrm>
-            <a:off x="457200" y="2734056"/>
-            <a:ext cx="3017434" cy="2475738"/>
+            <a:off x="457200" y="2560320"/>
+            <a:ext cx="2643291" cy="2649474"/>
           </a:xfrm>
           <a:prstGeom prst="roundRect">
             <a:avLst>
-              <a:gd name="adj" fmla="val 4432"/>
+              <a:gd name="adj" fmla="val 4151"/>
             </a:avLst>
           </a:prstGeom>
           <a:solidFill>
@@ -9490,8 +9871,8 @@
           <p:nvPr/>
         </p:nvGraphicFramePr>
         <p:xfrm>
-          <a:off x="640080" y="2916936"/>
-          <a:ext cx="2651674" cy="2109978"/>
+          <a:off x="640080" y="2743200"/>
+          <a:ext cx="2277531" cy="2283714"/>
         </p:xfrm>
         <a:graphic>
           <a:graphicData uri="http://schemas.openxmlformats.org/drawingml/2006/chart">
@@ -9507,12 +9888,12 @@
         </p:nvSpPr>
         <p:spPr>
           <a:xfrm>
-            <a:off x="3748954" y="2734056"/>
-            <a:ext cx="3687975" cy="2475738"/>
+            <a:off x="3374811" y="2560320"/>
+            <a:ext cx="3576218" cy="2649474"/>
           </a:xfrm>
           <a:prstGeom prst="roundRect">
             <a:avLst>
-              <a:gd name="adj" fmla="val 4432"/>
+              <a:gd name="adj" fmla="val 4141"/>
             </a:avLst>
           </a:prstGeom>
           <a:solidFill>
@@ -9554,8 +9935,8 @@
           <p:nvPr/>
         </p:nvGraphicFramePr>
         <p:xfrm>
-          <a:off x="3931834" y="2916936"/>
-          <a:ext cx="3322215" cy="2109978"/>
+          <a:off x="3557691" y="2743200"/>
+          <a:ext cx="3210458" cy="2283714"/>
         </p:xfrm>
         <a:graphic>
           <a:graphicData uri="http://schemas.openxmlformats.org/drawingml/2006/chart">
@@ -9571,12 +9952,12 @@
         </p:nvSpPr>
         <p:spPr>
           <a:xfrm>
-            <a:off x="7711249" y="2734056"/>
-            <a:ext cx="4023245" cy="2475738"/>
+            <a:off x="7225350" y="2560320"/>
+            <a:ext cx="4509144" cy="2649474"/>
           </a:xfrm>
           <a:prstGeom prst="roundRect">
             <a:avLst>
-              <a:gd name="adj" fmla="val 4432"/>
+              <a:gd name="adj" fmla="val 4141"/>
             </a:avLst>
           </a:prstGeom>
           <a:solidFill>
@@ -9618,8 +9999,8 @@
           <p:nvPr/>
         </p:nvGraphicFramePr>
         <p:xfrm>
-          <a:off x="7894129" y="2916936"/>
-          <a:ext cx="3657485" cy="2057400"/>
+          <a:off x="7408230" y="2743200"/>
+          <a:ext cx="4143384" cy="2057400"/>
         </p:xfrm>
         <a:graphic>
           <a:graphicData uri="http://schemas.openxmlformats.org/drawingml/2006/table">
@@ -9628,10 +10009,10 @@
                 <a:tableStyleId>{5C22544A-7EE6-4342-B048-85BDC9FD1C3A}</a:tableStyleId>
               </a:tblPr>
               <a:tblGrid>
-                <a:gridCol w="914371"/>
-                <a:gridCol w="914371"/>
-                <a:gridCol w="914371"/>
-                <a:gridCol w="914372"/>
+                <a:gridCol w="1035846"/>
+                <a:gridCol w="1035846"/>
+                <a:gridCol w="1035846"/>
+                <a:gridCol w="1035846"/>
               </a:tblGrid>
               <a:tr h="411480">
                 <a:tc>
@@ -10116,11 +10497,11 @@
         <p:spPr>
           <a:xfrm>
             <a:off x="457200" y="1417320"/>
-            <a:ext cx="2072579" cy="1042416"/>
+            <a:ext cx="2072579" cy="868680"/>
           </a:xfrm>
           <a:prstGeom prst="roundRect">
             <a:avLst>
-              <a:gd name="adj" fmla="val 12280"/>
+              <a:gd name="adj" fmla="val 14736"/>
             </a:avLst>
           </a:prstGeom>
           <a:solidFill>
@@ -10164,7 +10545,7 @@
         <p:spPr>
           <a:xfrm>
             <a:off x="640080" y="1508760"/>
-            <a:ext cx="1706819" cy="859536"/>
+            <a:ext cx="1706819" cy="685800"/>
           </a:xfrm>
           <a:prstGeom prst="rect">
             <a:avLst/>
@@ -10209,11 +10590,11 @@
         <p:spPr>
           <a:xfrm>
             <a:off x="2758379" y="1417320"/>
-            <a:ext cx="2072579" cy="1042416"/>
+            <a:ext cx="2072579" cy="868680"/>
           </a:xfrm>
           <a:prstGeom prst="roundRect">
             <a:avLst>
-              <a:gd name="adj" fmla="val 12280"/>
+              <a:gd name="adj" fmla="val 14736"/>
             </a:avLst>
           </a:prstGeom>
           <a:solidFill>
@@ -10257,7 +10638,7 @@
         <p:spPr>
           <a:xfrm>
             <a:off x="2941259" y="1508760"/>
-            <a:ext cx="1706819" cy="859536"/>
+            <a:ext cx="1706819" cy="685800"/>
           </a:xfrm>
           <a:prstGeom prst="rect">
             <a:avLst/>
@@ -10302,11 +10683,11 @@
         <p:spPr>
           <a:xfrm>
             <a:off x="5059558" y="1417320"/>
-            <a:ext cx="2072579" cy="1042416"/>
+            <a:ext cx="2072579" cy="868680"/>
           </a:xfrm>
           <a:prstGeom prst="roundRect">
             <a:avLst>
-              <a:gd name="adj" fmla="val 12280"/>
+              <a:gd name="adj" fmla="val 14736"/>
             </a:avLst>
           </a:prstGeom>
           <a:solidFill>
@@ -10350,7 +10731,7 @@
         <p:spPr>
           <a:xfrm>
             <a:off x="5242438" y="1508760"/>
-            <a:ext cx="1706819" cy="859536"/>
+            <a:ext cx="1706819" cy="685800"/>
           </a:xfrm>
           <a:prstGeom prst="rect">
             <a:avLst/>
@@ -10395,11 +10776,11 @@
         <p:spPr>
           <a:xfrm>
             <a:off x="7360737" y="1417320"/>
-            <a:ext cx="2072579" cy="1042416"/>
+            <a:ext cx="2072579" cy="868680"/>
           </a:xfrm>
           <a:prstGeom prst="roundRect">
             <a:avLst>
-              <a:gd name="adj" fmla="val 12280"/>
+              <a:gd name="adj" fmla="val 14736"/>
             </a:avLst>
           </a:prstGeom>
           <a:solidFill>
@@ -10443,7 +10824,7 @@
         <p:spPr>
           <a:xfrm>
             <a:off x="7543617" y="1508760"/>
-            <a:ext cx="1706819" cy="859536"/>
+            <a:ext cx="1706819" cy="685800"/>
           </a:xfrm>
           <a:prstGeom prst="rect">
             <a:avLst/>
@@ -10488,11 +10869,11 @@
         <p:spPr>
           <a:xfrm>
             <a:off x="9661916" y="1417320"/>
-            <a:ext cx="2072579" cy="1042416"/>
+            <a:ext cx="2072579" cy="868680"/>
           </a:xfrm>
           <a:prstGeom prst="roundRect">
             <a:avLst>
-              <a:gd name="adj" fmla="val 12280"/>
+              <a:gd name="adj" fmla="val 14736"/>
             </a:avLst>
           </a:prstGeom>
           <a:solidFill>
@@ -10536,7 +10917,7 @@
         <p:spPr>
           <a:xfrm>
             <a:off x="9844796" y="1508760"/>
-            <a:ext cx="1706819" cy="859536"/>
+            <a:ext cx="1706819" cy="685800"/>
           </a:xfrm>
           <a:prstGeom prst="rect">
             <a:avLst/>

--- a/out/demo_advanced.pptx
+++ b/out/demo_advanced.pptx
@@ -12811,12 +12811,12 @@
         </p:nvSpPr>
         <p:spPr>
           <a:xfrm>
-            <a:off x="2658241" y="2720340"/>
-            <a:ext cx="2286000" cy="2286000"/>
+            <a:off x="2626237" y="2688336"/>
+            <a:ext cx="2350008" cy="2350008"/>
           </a:xfrm>
           <a:prstGeom prst="donut">
             <a:avLst>
-              <a:gd name="adj" fmla="val 2799"/>
+              <a:gd name="adj" fmla="val 2723"/>
             </a:avLst>
           </a:prstGeom>
           <a:solidFill>
@@ -12857,7 +12857,7 @@
         </p:nvSpPr>
         <p:spPr>
           <a:xfrm rot="7200000">
-            <a:off x="4263013" y="2782032"/>
+            <a:off x="4289409" y="2797272"/>
             <a:ext cx="219456" cy="182880"/>
           </a:xfrm>
           <a:prstGeom prst="triangle">
@@ -12901,7 +12901,7 @@
         </p:nvSpPr>
         <p:spPr>
           <a:xfrm rot="10800000">
-            <a:off x="4834513" y="3771900"/>
+            <a:off x="4834513" y="3802380"/>
             <a:ext cx="219456" cy="182880"/>
           </a:xfrm>
           <a:prstGeom prst="triangle">
@@ -12945,7 +12945,7 @@
         </p:nvSpPr>
         <p:spPr>
           <a:xfrm rot="14400000">
-            <a:off x="4263013" y="4761767"/>
+            <a:off x="4236617" y="4777007"/>
             <a:ext cx="219456" cy="182880"/>
           </a:xfrm>
           <a:prstGeom prst="triangle">
@@ -12989,7 +12989,7 @@
         </p:nvSpPr>
         <p:spPr>
           <a:xfrm rot="18000000">
-            <a:off x="3120013" y="4761767"/>
+            <a:off x="3093617" y="4746527"/>
             <a:ext cx="219456" cy="182880"/>
           </a:xfrm>
           <a:prstGeom prst="triangle">
@@ -13033,7 +13033,7 @@
         </p:nvSpPr>
         <p:spPr>
           <a:xfrm rot="0">
-            <a:off x="2548513" y="3771900"/>
+            <a:off x="2548513" y="3741420"/>
             <a:ext cx="219456" cy="182880"/>
           </a:xfrm>
           <a:prstGeom prst="triangle">
@@ -13077,7 +13077,7 @@
         </p:nvSpPr>
         <p:spPr>
           <a:xfrm rot="3600000">
-            <a:off x="3120013" y="2782032"/>
+            <a:off x="3146409" y="2766792"/>
             <a:ext cx="219456" cy="182880"/>
           </a:xfrm>
           <a:prstGeom prst="triangle">

--- a/out/demo_advanced.pptx
+++ b/out/demo_advanced.pptx
@@ -12864,7 +12864,7 @@
             <a:avLst/>
           </a:prstGeom>
           <a:solidFill>
-            <a:srgbClr val="CDD6E1"/>
+            <a:srgbClr val="5C6B7A"/>
           </a:solidFill>
           <a:ln>
             <a:noFill/>
@@ -12908,7 +12908,7 @@
             <a:avLst/>
           </a:prstGeom>
           <a:solidFill>
-            <a:srgbClr val="CDD6E1"/>
+            <a:srgbClr val="5C6B7A"/>
           </a:solidFill>
           <a:ln>
             <a:noFill/>
@@ -12952,7 +12952,7 @@
             <a:avLst/>
           </a:prstGeom>
           <a:solidFill>
-            <a:srgbClr val="CDD6E1"/>
+            <a:srgbClr val="5C6B7A"/>
           </a:solidFill>
           <a:ln>
             <a:noFill/>
@@ -12996,7 +12996,7 @@
             <a:avLst/>
           </a:prstGeom>
           <a:solidFill>
-            <a:srgbClr val="CDD6E1"/>
+            <a:srgbClr val="5C6B7A"/>
           </a:solidFill>
           <a:ln>
             <a:noFill/>
@@ -13040,7 +13040,7 @@
             <a:avLst/>
           </a:prstGeom>
           <a:solidFill>
-            <a:srgbClr val="CDD6E1"/>
+            <a:srgbClr val="5C6B7A"/>
           </a:solidFill>
           <a:ln>
             <a:noFill/>
@@ -13084,7 +13084,7 @@
             <a:avLst/>
           </a:prstGeom>
           <a:solidFill>
-            <a:srgbClr val="CDD6E1"/>
+            <a:srgbClr val="5C6B7A"/>
           </a:solidFill>
           <a:ln>
             <a:noFill/>
